--- a/Презентация.pptx
+++ b/Презентация.pptx
@@ -245,7 +245,7 @@
             <a:fld id="{81889651-8717-4893-A7BC-D6C1B191EF1D}" type="datetimeFigureOut">
               <a:rPr lang="ru-RU" smtClean="0"/>
               <a:pPr/>
-              <a:t>13.06.2026</a:t>
+              <a:t>23.06.2026</a:t>
             </a:fld>
             <a:endParaRPr lang="ru-RU"/>
           </a:p>
@@ -661,7 +661,7 @@
             <a:fld id="{D906D964-A20D-48BF-AC3A-F0B8588F3A52}" type="datetime1">
               <a:rPr lang="ru-RU" smtClean="0"/>
               <a:pPr/>
-              <a:t>13.06.2026</a:t>
+              <a:t>23.06.2026</a:t>
             </a:fld>
             <a:endParaRPr lang="ru-RU"/>
           </a:p>
@@ -861,7 +861,7 @@
             <a:fld id="{FBA5DFB7-F2D0-4C0F-B7FC-4B92C42D4DDA}" type="datetime1">
               <a:rPr lang="ru-RU" smtClean="0"/>
               <a:pPr/>
-              <a:t>13.06.2026</a:t>
+              <a:t>23.06.2026</a:t>
             </a:fld>
             <a:endParaRPr lang="ru-RU"/>
           </a:p>
@@ -1071,7 +1071,7 @@
             <a:fld id="{4B157CE6-5C92-4370-87E5-401798666AA6}" type="datetime1">
               <a:rPr lang="ru-RU" smtClean="0"/>
               <a:pPr/>
-              <a:t>13.06.2026</a:t>
+              <a:t>23.06.2026</a:t>
             </a:fld>
             <a:endParaRPr lang="ru-RU"/>
           </a:p>
@@ -1271,7 +1271,7 @@
             <a:fld id="{CAC1B5D4-D15C-488C-93D0-8626A238E5FB}" type="datetime1">
               <a:rPr lang="ru-RU" smtClean="0"/>
               <a:pPr/>
-              <a:t>13.06.2026</a:t>
+              <a:t>23.06.2026</a:t>
             </a:fld>
             <a:endParaRPr lang="ru-RU"/>
           </a:p>
@@ -1548,7 +1548,7 @@
             <a:fld id="{198767A0-6589-4C54-8CEA-FBC86C078425}" type="datetime1">
               <a:rPr lang="ru-RU" smtClean="0"/>
               <a:pPr/>
-              <a:t>13.06.2026</a:t>
+              <a:t>23.06.2026</a:t>
             </a:fld>
             <a:endParaRPr lang="ru-RU"/>
           </a:p>
@@ -1815,7 +1815,7 @@
             <a:fld id="{D75FCD17-E5F5-458B-BE3B-36DC60D79287}" type="datetime1">
               <a:rPr lang="ru-RU" smtClean="0"/>
               <a:pPr/>
-              <a:t>13.06.2026</a:t>
+              <a:t>23.06.2026</a:t>
             </a:fld>
             <a:endParaRPr lang="ru-RU"/>
           </a:p>
@@ -2229,7 +2229,7 @@
             <a:fld id="{ABB3624D-2B1D-4FF8-A1C5-6192CFBAFF28}" type="datetime1">
               <a:rPr lang="ru-RU" smtClean="0"/>
               <a:pPr/>
-              <a:t>13.06.2026</a:t>
+              <a:t>23.06.2026</a:t>
             </a:fld>
             <a:endParaRPr lang="ru-RU"/>
           </a:p>
@@ -2372,7 +2372,7 @@
             <a:fld id="{07FAA9B1-4301-434A-B037-7F81239DF95B}" type="datetime1">
               <a:rPr lang="ru-RU" smtClean="0"/>
               <a:pPr/>
-              <a:t>13.06.2026</a:t>
+              <a:t>23.06.2026</a:t>
             </a:fld>
             <a:endParaRPr lang="ru-RU"/>
           </a:p>
@@ -2487,7 +2487,7 @@
             <a:fld id="{D2513F6B-75EF-47D5-9303-BF530744131F}" type="datetime1">
               <a:rPr lang="ru-RU" smtClean="0"/>
               <a:pPr/>
-              <a:t>13.06.2026</a:t>
+              <a:t>23.06.2026</a:t>
             </a:fld>
             <a:endParaRPr lang="ru-RU"/>
           </a:p>
@@ -2800,7 +2800,7 @@
             <a:fld id="{A4B8B0E4-663A-46D8-B871-37D6C639E251}" type="datetime1">
               <a:rPr lang="ru-RU" smtClean="0"/>
               <a:pPr/>
-              <a:t>13.06.2026</a:t>
+              <a:t>23.06.2026</a:t>
             </a:fld>
             <a:endParaRPr lang="ru-RU"/>
           </a:p>
@@ -3090,7 +3090,7 @@
             <a:fld id="{65FAAA0F-0464-4B3D-BB64-F8C1C94775D5}" type="datetime1">
               <a:rPr lang="ru-RU" smtClean="0"/>
               <a:pPr/>
-              <a:t>13.06.2026</a:t>
+              <a:t>23.06.2026</a:t>
             </a:fld>
             <a:endParaRPr lang="ru-RU"/>
           </a:p>
@@ -3333,7 +3333,7 @@
             <a:fld id="{E74C1C41-2071-4D7E-A915-30B8D912A166}" type="datetime1">
               <a:rPr lang="ru-RU" smtClean="0"/>
               <a:pPr/>
-              <a:t>13.06.2026</a:t>
+              <a:t>23.06.2026</a:t>
             </a:fld>
             <a:endParaRPr lang="ru-RU"/>
           </a:p>
@@ -4256,10 +4256,10 @@
       </p:sp>
       <p:pic>
         <p:nvPicPr>
-          <p:cNvPr id="4" name="Рисунок 3">
-            <a:extLst>
-              <a:ext uri="{FF2B5EF4-FFF2-40B4-BE49-F238E27FC236}">
-                <a16:creationId xmlns:a16="http://schemas.microsoft.com/office/drawing/2014/main" id="{10930684-B8BF-7BB2-B5D3-7C6C76E4C186}"/>
+          <p:cNvPr id="6" name="Рисунок 5">
+            <a:extLst>
+              <a:ext uri="{FF2B5EF4-FFF2-40B4-BE49-F238E27FC236}">
+                <a16:creationId xmlns:a16="http://schemas.microsoft.com/office/drawing/2014/main" id="{C4CF71F3-6AEA-AC28-A65D-2B34284A7500}"/>
               </a:ext>
             </a:extLst>
           </p:cNvPr>
@@ -4276,8 +4276,8 @@
         </p:blipFill>
         <p:spPr>
           <a:xfrm>
-            <a:off x="726825" y="1080253"/>
-            <a:ext cx="10738340" cy="5383518"/>
+            <a:off x="495046" y="1217085"/>
+            <a:ext cx="11201896" cy="5429248"/>
           </a:xfrm>
           <a:prstGeom prst="rect">
             <a:avLst/>
@@ -4344,12 +4344,51 @@
           </a:p>
         </p:txBody>
       </p:sp>
+      <p:sp>
+        <p:nvSpPr>
+          <p:cNvPr id="4" name="TextBox 3">
+            <a:extLst>
+              <a:ext uri="{FF2B5EF4-FFF2-40B4-BE49-F238E27FC236}">
+                <a16:creationId xmlns:a16="http://schemas.microsoft.com/office/drawing/2014/main" id="{5B1C587C-9082-AD92-04B6-7CB0A2ACE810}"/>
+              </a:ext>
+            </a:extLst>
+          </p:cNvPr>
+          <p:cNvSpPr txBox="1"/>
+          <p:nvPr/>
+        </p:nvSpPr>
+        <p:spPr>
+          <a:xfrm>
+            <a:off x="2497661" y="29104"/>
+            <a:ext cx="7196667" cy="584775"/>
+          </a:xfrm>
+          <a:prstGeom prst="rect">
+            <a:avLst/>
+          </a:prstGeom>
+          <a:noFill/>
+        </p:spPr>
+        <p:txBody>
+          <a:bodyPr wrap="square" rtlCol="0">
+            <a:spAutoFit/>
+          </a:bodyPr>
+          <a:lstStyle/>
+          <a:p>
+            <a:pPr algn="ctr"/>
+            <a:r>
+              <a:rPr lang="ru-RU" sz="3200" dirty="0">
+                <a:latin typeface="Times New Roman" panose="02020603050405020304" pitchFamily="18" charset="0"/>
+                <a:cs typeface="Times New Roman" panose="02020603050405020304" pitchFamily="18" charset="0"/>
+              </a:rPr>
+              <a:t>Создание тикета в поддержку</a:t>
+            </a:r>
+          </a:p>
+        </p:txBody>
+      </p:sp>
       <p:pic>
         <p:nvPicPr>
-          <p:cNvPr id="3" name="Рисунок 2">
-            <a:extLst>
-              <a:ext uri="{FF2B5EF4-FFF2-40B4-BE49-F238E27FC236}">
-                <a16:creationId xmlns:a16="http://schemas.microsoft.com/office/drawing/2014/main" id="{5B8CD520-BB07-A1CC-D3B2-8BB9902A2981}"/>
+          <p:cNvPr id="6" name="Рисунок 5">
+            <a:extLst>
+              <a:ext uri="{FF2B5EF4-FFF2-40B4-BE49-F238E27FC236}">
+                <a16:creationId xmlns:a16="http://schemas.microsoft.com/office/drawing/2014/main" id="{A525EACB-2543-75DC-76E8-AFB7E826F79D}"/>
               </a:ext>
             </a:extLst>
           </p:cNvPr>
@@ -4366,53 +4405,14 @@
         </p:blipFill>
         <p:spPr>
           <a:xfrm>
-            <a:off x="1969472" y="757808"/>
-            <a:ext cx="8253044" cy="5781104"/>
+            <a:off x="253606" y="723900"/>
+            <a:ext cx="11684788" cy="5410200"/>
           </a:xfrm>
           <a:prstGeom prst="rect">
             <a:avLst/>
           </a:prstGeom>
         </p:spPr>
       </p:pic>
-      <p:sp>
-        <p:nvSpPr>
-          <p:cNvPr id="4" name="TextBox 3">
-            <a:extLst>
-              <a:ext uri="{FF2B5EF4-FFF2-40B4-BE49-F238E27FC236}">
-                <a16:creationId xmlns:a16="http://schemas.microsoft.com/office/drawing/2014/main" id="{5B1C587C-9082-AD92-04B6-7CB0A2ACE810}"/>
-              </a:ext>
-            </a:extLst>
-          </p:cNvPr>
-          <p:cNvSpPr txBox="1"/>
-          <p:nvPr/>
-        </p:nvSpPr>
-        <p:spPr>
-          <a:xfrm>
-            <a:off x="2497661" y="29104"/>
-            <a:ext cx="7196667" cy="584775"/>
-          </a:xfrm>
-          <a:prstGeom prst="rect">
-            <a:avLst/>
-          </a:prstGeom>
-          <a:noFill/>
-        </p:spPr>
-        <p:txBody>
-          <a:bodyPr wrap="square" rtlCol="0">
-            <a:spAutoFit/>
-          </a:bodyPr>
-          <a:lstStyle/>
-          <a:p>
-            <a:pPr algn="ctr"/>
-            <a:r>
-              <a:rPr lang="ru-RU" sz="3200" dirty="0">
-                <a:latin typeface="Times New Roman" panose="02020603050405020304" pitchFamily="18" charset="0"/>
-                <a:cs typeface="Times New Roman" panose="02020603050405020304" pitchFamily="18" charset="0"/>
-              </a:rPr>
-              <a:t>Создание тикета в поддержку</a:t>
-            </a:r>
-          </a:p>
-        </p:txBody>
-      </p:sp>
     </p:spTree>
     <p:extLst>
       <p:ext uri="{BB962C8B-B14F-4D97-AF65-F5344CB8AC3E}">
@@ -4503,18 +4503,11 @@
           <a:p>
             <a:pPr algn="ctr"/>
             <a:r>
-              <a:rPr lang="ru-RU" sz="3200" dirty="0" err="1">
-                <a:latin typeface="Times New Roman" panose="02020603050405020304" pitchFamily="18" charset="0"/>
-                <a:cs typeface="Times New Roman" panose="02020603050405020304" pitchFamily="18" charset="0"/>
-              </a:rPr>
-              <a:t>Дашборд</a:t>
-            </a:r>
-            <a:r>
               <a:rPr lang="ru-RU" sz="3200" dirty="0">
                 <a:latin typeface="Times New Roman" panose="02020603050405020304" pitchFamily="18" charset="0"/>
                 <a:cs typeface="Times New Roman" panose="02020603050405020304" pitchFamily="18" charset="0"/>
               </a:rPr>
-              <a:t> (основная страница)</a:t>
+              <a:t>Главная страница</a:t>
             </a:r>
             <a:r>
               <a:rPr lang="en-US" sz="3200" dirty="0">
@@ -4535,10 +4528,10 @@
       </p:sp>
       <p:pic>
         <p:nvPicPr>
-          <p:cNvPr id="6" name="Рисунок 5">
-            <a:extLst>
-              <a:ext uri="{FF2B5EF4-FFF2-40B4-BE49-F238E27FC236}">
-                <a16:creationId xmlns:a16="http://schemas.microsoft.com/office/drawing/2014/main" id="{0624C1A3-47CF-8C12-5E0F-EA384191D90F}"/>
+          <p:cNvPr id="4" name="Рисунок 3">
+            <a:extLst>
+              <a:ext uri="{FF2B5EF4-FFF2-40B4-BE49-F238E27FC236}">
+                <a16:creationId xmlns:a16="http://schemas.microsoft.com/office/drawing/2014/main" id="{E802B8DD-264B-9E17-1875-F14FA40BFB75}"/>
               </a:ext>
             </a:extLst>
           </p:cNvPr>
@@ -4555,8 +4548,8 @@
         </p:blipFill>
         <p:spPr>
           <a:xfrm>
-            <a:off x="1336955" y="1364665"/>
-            <a:ext cx="9518078" cy="4733342"/>
+            <a:off x="1600194" y="1519749"/>
+            <a:ext cx="8991600" cy="4423174"/>
           </a:xfrm>
           <a:prstGeom prst="rect">
             <a:avLst/>
@@ -4807,14 +4800,13 @@
         </p:nvPicPr>
         <p:blipFill>
           <a:blip r:embed="rId2"/>
-          <a:stretch>
-            <a:fillRect/>
-          </a:stretch>
+          <a:srcRect t="10099"/>
+          <a:stretch/>
         </p:blipFill>
         <p:spPr>
           <a:xfrm>
-            <a:off x="676274" y="695674"/>
-            <a:ext cx="10839452" cy="5466652"/>
+            <a:off x="676274" y="1247774"/>
+            <a:ext cx="10839452" cy="4914551"/>
           </a:xfrm>
           <a:prstGeom prst="rect">
             <a:avLst/>
